--- a/assets/pptx/catalog-464.pptx
+++ b/assets/pptx/catalog-464.pptx
@@ -3306,7 +3306,7 @@
                 <a:ea typeface="Ebrima"/>
                 <a:cs typeface="Ebrima"/>
               </a:rPr>
-              <a:t>በእጁ ታክሞ (2x)</a:t>
+              <a:t>በእጁ ታክሞ 2x</a:t>
             </a:r>
           </a:p>
         </p:txBody>
@@ -3427,7 +3427,7 @@
                 <a:ea typeface="Ebrima"/>
                 <a:cs typeface="Ebrima"/>
               </a:rPr>
-              <a:t>ያ ምስኪን ልጅ ሥሙ ማነው (2x)</a:t>
+              <a:t>ያ ምስኪን ልጅ ሥሙ ማነው 2x</a:t>
             </a:r>
           </a:p>
         </p:txBody>
@@ -3651,7 +3651,7 @@
                 <a:ea typeface="Ebrima"/>
                 <a:cs typeface="Ebrima"/>
               </a:rPr>
-              <a:t>መዝሙር ለአንተ ነው (2x)</a:t>
+              <a:t>መዝሙር ለአንተ ነው 2x</a:t>
             </a:r>
           </a:p>
         </p:txBody>
@@ -3772,7 +3772,7 @@
                 <a:ea typeface="Ebrima"/>
                 <a:cs typeface="Ebrima"/>
               </a:rPr>
-              <a:t>ያ ምስኪን ልጅ ሥሙ ማነው (2x)</a:t>
+              <a:t>ያ ምስኪን ልጅ ሥሙ ማነው 2x</a:t>
             </a:r>
           </a:p>
         </p:txBody>
@@ -3978,7 +3978,7 @@
                 <a:ea typeface="Ebrima"/>
                 <a:cs typeface="Ebrima"/>
               </a:rPr>
-              <a:t>ሰው ሊያደርገኝ ወደደና ቤቴ ገባና (2x)</a:t>
+              <a:t>ሰው ሊያደርገኝ ወደደና ቤቴ ገባና 2x</a:t>
             </a:r>
           </a:p>
         </p:txBody>
@@ -4099,7 +4099,7 @@
                 <a:ea typeface="Ebrima"/>
                 <a:cs typeface="Ebrima"/>
               </a:rPr>
-              <a:t>ያ ምስኪን ልጅ ስሙ ማነው (2x)</a:t>
+              <a:t>ያ ምስኪን ልጅ ስሙ ማነው 2x</a:t>
             </a:r>
           </a:p>
         </p:txBody>
@@ -4323,7 +4323,7 @@
                 <a:ea typeface="Ebrima"/>
                 <a:cs typeface="Ebrima"/>
               </a:rPr>
-              <a:t>ያ ሰው እኔ ነኝ (2x)</a:t>
+              <a:t>ያ ሰው እኔ ነኝ 2x</a:t>
             </a:r>
           </a:p>
         </p:txBody>
@@ -4444,7 +4444,7 @@
                 <a:ea typeface="Ebrima"/>
                 <a:cs typeface="Ebrima"/>
               </a:rPr>
-              <a:t>ያ ምስኪን ልጅ ስሙ ማነው (2x)</a:t>
+              <a:t>ያ ምስኪን ልጅ ስሙ ማነው 2x</a:t>
             </a:r>
           </a:p>
         </p:txBody>
